--- a/presentation.pptx
+++ b/presentation.pptx
@@ -22,6 +22,9 @@
     <p:sldId id="270" r:id="rId17"/>
     <p:sldId id="271" r:id="rId18"/>
     <p:sldId id="272" r:id="rId19"/>
+    <p:sldId id="273" r:id="rId20"/>
+    <p:sldId id="274" r:id="rId21"/>
+    <p:sldId id="275" r:id="rId22"/>
   </p:sldIdLst>
   <p:sldSz cx="12192000" cy="6858000"/>
   <p:notesSz cx="6858000" cy="9144000"/>
@@ -4496,19 +4499,177 @@
             <p:ph type="title"/>
           </p:nvPr>
         </p:nvSpPr>
+        <p:spPr>
+          <a:xfrm>
+            <a:off x="609600" y="190500"/>
+            <a:ext cx="10972800" cy="582613"/>
+          </a:xfrm>
+        </p:spPr>
+        <p:txBody>
+          <a:bodyPr/>
+          <a:p>
+            <a:r>
+              <a:rPr lang="en-US" altLang="en-GB" b="1">
+                <a:latin typeface="Times New Roman" panose="02020603050405020304" charset="0"/>
+                <a:cs typeface="Times New Roman" panose="02020603050405020304" charset="0"/>
+                <a:sym typeface="+mn-ea"/>
+              </a:rPr>
+              <a:t>Team Contributions</a:t>
+            </a:r>
+            <a:endParaRPr lang="en-GB" altLang="en-US"/>
+          </a:p>
+        </p:txBody>
+      </p:sp>
+      <p:sp>
+        <p:nvSpPr>
+          <p:cNvPr id="3" name="Content Placeholder 2"/>
+          <p:cNvSpPr>
+            <a:spLocks noGrp="1"/>
+          </p:cNvSpPr>
+          <p:nvPr>
+            <p:ph idx="1"/>
+          </p:nvPr>
+        </p:nvSpPr>
         <p:spPr/>
         <p:txBody>
           <a:bodyPr/>
           <a:p>
+            <a:pPr marL="0" indent="0">
+              <a:buNone/>
+            </a:pPr>
+            <a:r>
+              <a:rPr lang="en-GB" altLang="en-GB" b="1">
+                <a:latin typeface="Times New Roman" panose="02020603050405020304" charset="0"/>
+                <a:cs typeface="Times New Roman" panose="02020603050405020304" charset="0"/>
+                <a:sym typeface="+mn-ea"/>
+              </a:rPr>
+              <a:t>Williams Afotey Botchway:</a:t>
+            </a:r>
+            <a:endParaRPr lang="en-GB" altLang="en-GB" b="1">
+              <a:latin typeface="Times New Roman" panose="02020603050405020304" charset="0"/>
+              <a:cs typeface="Times New Roman" panose="02020603050405020304" charset="0"/>
+              <a:sym typeface="+mn-ea"/>
+            </a:endParaRPr>
+          </a:p>
+          <a:p>
+            <a:pPr marL="0" indent="0">
+              <a:buNone/>
+            </a:pPr>
+            <a:endParaRPr lang="en-US" altLang="en-GB">
+              <a:latin typeface="Times New Roman" panose="02020603050405020304" charset="0"/>
+              <a:cs typeface="Times New Roman" panose="02020603050405020304" charset="0"/>
+            </a:endParaRPr>
+          </a:p>
+          <a:p>
+            <a:pPr marL="0" indent="0">
+              <a:buNone/>
+            </a:pPr>
+            <a:r>
+              <a:rPr lang="en-US" altLang="en-GB">
+                <a:latin typeface="Times New Roman" panose="02020603050405020304" charset="0"/>
+                <a:cs typeface="Times New Roman" panose="02020603050405020304" charset="0"/>
+                <a:sym typeface="+mn-ea"/>
+              </a:rPr>
+              <a:t>Designed system architecture</a:t>
+            </a:r>
+            <a:endParaRPr lang="en-US" altLang="en-GB">
+              <a:latin typeface="Times New Roman" panose="02020603050405020304" charset="0"/>
+              <a:cs typeface="Times New Roman" panose="02020603050405020304" charset="0"/>
+            </a:endParaRPr>
+          </a:p>
+          <a:p>
+            <a:pPr marL="0" indent="0">
+              <a:buNone/>
+            </a:pPr>
+            <a:r>
+              <a:rPr lang="en-US" altLang="en-GB">
+                <a:latin typeface="Times New Roman" panose="02020603050405020304" charset="0"/>
+                <a:cs typeface="Times New Roman" panose="02020603050405020304" charset="0"/>
+                <a:sym typeface="+mn-ea"/>
+              </a:rPr>
+              <a:t>Implemented orchestrator and agent workflow</a:t>
+            </a:r>
+            <a:endParaRPr lang="en-US" altLang="en-GB">
+              <a:latin typeface="Times New Roman" panose="02020603050405020304" charset="0"/>
+              <a:cs typeface="Times New Roman" panose="02020603050405020304" charset="0"/>
+            </a:endParaRPr>
+          </a:p>
+          <a:p>
+            <a:pPr marL="0" indent="0">
+              <a:buNone/>
+            </a:pPr>
+            <a:r>
+              <a:rPr lang="en-US" altLang="en-GB">
+                <a:latin typeface="Times New Roman" panose="02020603050405020304" charset="0"/>
+                <a:cs typeface="Times New Roman" panose="02020603050405020304" charset="0"/>
+                <a:sym typeface="+mn-ea"/>
+              </a:rPr>
+              <a:t>Built resume parsing and ranking logic</a:t>
+            </a:r>
+            <a:endParaRPr lang="en-US" altLang="en-GB">
+              <a:latin typeface="Times New Roman" panose="02020603050405020304" charset="0"/>
+              <a:cs typeface="Times New Roman" panose="02020603050405020304" charset="0"/>
+            </a:endParaRPr>
+          </a:p>
+          <a:p>
+            <a:pPr marL="0" indent="0">
+              <a:buNone/>
+            </a:pPr>
+            <a:r>
+              <a:rPr lang="en-US" altLang="en-GB">
+                <a:latin typeface="Times New Roman" panose="02020603050405020304" charset="0"/>
+                <a:cs typeface="Times New Roman" panose="02020603050405020304" charset="0"/>
+                <a:sym typeface="+mn-ea"/>
+              </a:rPr>
+              <a:t>Integrated APIs and UI</a:t>
+            </a:r>
+            <a:endParaRPr lang="en-GB" altLang="en-US"/>
+          </a:p>
+        </p:txBody>
+      </p:sp>
+    </p:spTree>
+  </p:cSld>
+  <p:clrMapOvr>
+    <a:masterClrMapping/>
+  </p:clrMapOvr>
+</p:sld>
+</file>
+
+<file path=ppt/slides/slide18.xml><?xml version="1.0" encoding="utf-8"?>
+<p:sld xmlns:a="http://schemas.openxmlformats.org/drawingml/2006/main" xmlns:r="http://schemas.openxmlformats.org/officeDocument/2006/relationships" xmlns:p="http://schemas.openxmlformats.org/presentationml/2006/main">
+  <p:cSld>
+    <p:spTree>
+      <p:nvGrpSpPr>
+        <p:cNvPr id="1" name=""/>
+        <p:cNvGrpSpPr/>
+        <p:nvPr/>
+      </p:nvGrpSpPr>
+      <p:grpSpPr/>
+      <p:sp>
+        <p:nvSpPr>
+          <p:cNvPr id="2" name="Title 1"/>
+          <p:cNvSpPr>
+            <a:spLocks noGrp="1"/>
+          </p:cNvSpPr>
+          <p:nvPr>
+            <p:ph type="title"/>
+          </p:nvPr>
+        </p:nvSpPr>
+        <p:spPr/>
+        <p:txBody>
+          <a:bodyPr/>
+          <a:p>
             <a:r>
               <a:rPr lang="en-US" altLang="en-GB" b="1">
                 <a:latin typeface="Times New Roman" panose="02020603050405020304" charset="0"/>
                 <a:cs typeface="Times New Roman" panose="02020603050405020304" charset="0"/>
-                <a:sym typeface="+mn-ea"/>
-              </a:rPr>
-              <a:t>Team Contributions</a:t>
-            </a:r>
-            <a:endParaRPr lang="en-GB" altLang="en-US"/>
+              </a:rPr>
+              <a:t>GitHub Repository</a:t>
+            </a:r>
+            <a:endParaRPr lang="en-US" altLang="en-GB" b="1">
+              <a:latin typeface="Times New Roman" panose="02020603050405020304" charset="0"/>
+              <a:cs typeface="Times New Roman" panose="02020603050405020304" charset="0"/>
+            </a:endParaRPr>
           </a:p>
         </p:txBody>
       </p:sp>
@@ -4530,23 +4691,35 @@
               <a:buNone/>
             </a:pPr>
             <a:r>
-              <a:rPr lang="en-GB" altLang="en-GB" b="1">
-                <a:latin typeface="Times New Roman" panose="02020603050405020304" charset="0"/>
-                <a:cs typeface="Times New Roman" panose="02020603050405020304" charset="0"/>
-                <a:sym typeface="+mn-ea"/>
-              </a:rPr>
-              <a:t>Williams Afotey Botchway:</a:t>
-            </a:r>
-            <a:endParaRPr lang="en-GB" altLang="en-GB" b="1">
-              <a:latin typeface="Times New Roman" panose="02020603050405020304" charset="0"/>
-              <a:cs typeface="Times New Roman" panose="02020603050405020304" charset="0"/>
-              <a:sym typeface="+mn-ea"/>
+              <a:rPr lang="en-US" altLang="en-GB" b="1">
+                <a:latin typeface="Times New Roman" panose="02020603050405020304" charset="0"/>
+                <a:cs typeface="Times New Roman" panose="02020603050405020304" charset="0"/>
+              </a:rPr>
+              <a:t>Repository Link</a:t>
+            </a:r>
+            <a:r>
+              <a:rPr lang="en-US" altLang="en-GB">
+                <a:latin typeface="Times New Roman" panose="02020603050405020304" charset="0"/>
+                <a:cs typeface="Times New Roman" panose="02020603050405020304" charset="0"/>
+              </a:rPr>
+              <a:t>:</a:t>
+            </a:r>
+            <a:endParaRPr lang="en-US" altLang="en-GB">
+              <a:latin typeface="Times New Roman" panose="02020603050405020304" charset="0"/>
+              <a:cs typeface="Times New Roman" panose="02020603050405020304" charset="0"/>
             </a:endParaRPr>
           </a:p>
           <a:p>
             <a:pPr marL="0" indent="0">
               <a:buNone/>
             </a:pPr>
+            <a:r>
+              <a:rPr lang="en-US" altLang="en-GB">
+                <a:latin typeface="Times New Roman" panose="02020603050405020304" charset="0"/>
+                <a:cs typeface="Times New Roman" panose="02020603050405020304" charset="0"/>
+              </a:rPr>
+              <a:t>https://github.com/AMS-JR/ai-career-assistant</a:t>
+            </a:r>
             <a:endParaRPr lang="en-US" altLang="en-GB">
               <a:latin typeface="Times New Roman" panose="02020603050405020304" charset="0"/>
               <a:cs typeface="Times New Roman" panose="02020603050405020304" charset="0"/>
@@ -4556,14 +4729,6 @@
             <a:pPr marL="0" indent="0">
               <a:buNone/>
             </a:pPr>
-            <a:r>
-              <a:rPr lang="en-US" altLang="en-GB">
-                <a:latin typeface="Times New Roman" panose="02020603050405020304" charset="0"/>
-                <a:cs typeface="Times New Roman" panose="02020603050405020304" charset="0"/>
-                <a:sym typeface="+mn-ea"/>
-              </a:rPr>
-              <a:t>Designed system architecture</a:t>
-            </a:r>
             <a:endParaRPr lang="en-US" altLang="en-GB">
               <a:latin typeface="Times New Roman" panose="02020603050405020304" charset="0"/>
               <a:cs typeface="Times New Roman" panose="02020603050405020304" charset="0"/>
@@ -4574,12 +4739,18 @@
               <a:buNone/>
             </a:pPr>
             <a:r>
-              <a:rPr lang="en-US" altLang="en-GB">
-                <a:latin typeface="Times New Roman" panose="02020603050405020304" charset="0"/>
-                <a:cs typeface="Times New Roman" panose="02020603050405020304" charset="0"/>
-                <a:sym typeface="+mn-ea"/>
-              </a:rPr>
-              <a:t>Implemented orchestrator and agent workflow</a:t>
+              <a:rPr lang="en-US" altLang="en-GB" b="1">
+                <a:latin typeface="Times New Roman" panose="02020603050405020304" charset="0"/>
+                <a:cs typeface="Times New Roman" panose="02020603050405020304" charset="0"/>
+              </a:rPr>
+              <a:t>Includes</a:t>
+            </a:r>
+            <a:r>
+              <a:rPr lang="en-US" altLang="en-GB">
+                <a:latin typeface="Times New Roman" panose="02020603050405020304" charset="0"/>
+                <a:cs typeface="Times New Roman" panose="02020603050405020304" charset="0"/>
+              </a:rPr>
+              <a:t>:</a:t>
             </a:r>
             <a:endParaRPr lang="en-US" altLang="en-GB">
               <a:latin typeface="Times New Roman" panose="02020603050405020304" charset="0"/>
@@ -4590,32 +4761,231 @@
             <a:pPr marL="0" indent="0">
               <a:buNone/>
             </a:pPr>
-            <a:r>
-              <a:rPr lang="en-US" altLang="en-GB">
-                <a:latin typeface="Times New Roman" panose="02020603050405020304" charset="0"/>
-                <a:cs typeface="Times New Roman" panose="02020603050405020304" charset="0"/>
-                <a:sym typeface="+mn-ea"/>
-              </a:rPr>
-              <a:t>Built resume parsing and ranking logic</a:t>
-            </a:r>
-            <a:endParaRPr lang="en-US" altLang="en-GB">
-              <a:latin typeface="Times New Roman" panose="02020603050405020304" charset="0"/>
-              <a:cs typeface="Times New Roman" panose="02020603050405020304" charset="0"/>
-            </a:endParaRPr>
-          </a:p>
+            <a:endParaRPr lang="en-US" altLang="en-GB">
+              <a:latin typeface="Times New Roman" panose="02020603050405020304" charset="0"/>
+              <a:cs typeface="Times New Roman" panose="02020603050405020304" charset="0"/>
+            </a:endParaRPr>
+          </a:p>
+          <a:p>
+            <a:r>
+              <a:rPr lang="en-US" altLang="en-GB">
+                <a:latin typeface="Times New Roman" panose="02020603050405020304" charset="0"/>
+                <a:cs typeface="Times New Roman" panose="02020603050405020304" charset="0"/>
+              </a:rPr>
+              <a:t>Full source code</a:t>
+            </a:r>
+            <a:endParaRPr lang="en-US" altLang="en-GB">
+              <a:latin typeface="Times New Roman" panose="02020603050405020304" charset="0"/>
+              <a:cs typeface="Times New Roman" panose="02020603050405020304" charset="0"/>
+            </a:endParaRPr>
+          </a:p>
+          <a:p>
+            <a:r>
+              <a:rPr lang="en-US" altLang="en-GB">
+                <a:latin typeface="Times New Roman" panose="02020603050405020304" charset="0"/>
+                <a:cs typeface="Times New Roman" panose="02020603050405020304" charset="0"/>
+              </a:rPr>
+              <a:t>Agent implementations</a:t>
+            </a:r>
+            <a:endParaRPr lang="en-US" altLang="en-GB">
+              <a:latin typeface="Times New Roman" panose="02020603050405020304" charset="0"/>
+              <a:cs typeface="Times New Roman" panose="02020603050405020304" charset="0"/>
+            </a:endParaRPr>
+          </a:p>
+          <a:p>
+            <a:r>
+              <a:rPr lang="en-US" altLang="en-GB">
+                <a:latin typeface="Times New Roman" panose="02020603050405020304" charset="0"/>
+                <a:cs typeface="Times New Roman" panose="02020603050405020304" charset="0"/>
+              </a:rPr>
+              <a:t>API integrations</a:t>
+            </a:r>
+            <a:endParaRPr lang="en-US" altLang="en-GB">
+              <a:latin typeface="Times New Roman" panose="02020603050405020304" charset="0"/>
+              <a:cs typeface="Times New Roman" panose="02020603050405020304" charset="0"/>
+            </a:endParaRPr>
+          </a:p>
+          <a:p>
+            <a:r>
+              <a:rPr lang="en-US" altLang="en-GB">
+                <a:latin typeface="Times New Roman" panose="02020603050405020304" charset="0"/>
+                <a:cs typeface="Times New Roman" panose="02020603050405020304" charset="0"/>
+              </a:rPr>
+              <a:t>UI (Gradio)</a:t>
+            </a:r>
+            <a:endParaRPr lang="en-US" altLang="en-GB">
+              <a:latin typeface="Times New Roman" panose="02020603050405020304" charset="0"/>
+              <a:cs typeface="Times New Roman" panose="02020603050405020304" charset="0"/>
+            </a:endParaRPr>
+          </a:p>
+        </p:txBody>
+      </p:sp>
+      <p:sp>
+        <p:nvSpPr>
+          <p:cNvPr id="4" name="Text Box 3"/>
+          <p:cNvSpPr txBox="1"/>
+          <p:nvPr/>
+        </p:nvSpPr>
+        <p:spPr>
+          <a:xfrm>
+            <a:off x="3556000" y="3260408"/>
+            <a:ext cx="5080000" cy="337185"/>
+          </a:xfrm>
+          <a:prstGeom prst="rect">
+            <a:avLst/>
+          </a:prstGeom>
+        </p:spPr>
+        <p:txBody>
+          <a:bodyPr>
+            <a:spAutoFit/>
+          </a:bodyPr>
+          <a:p>
+            <a:r>
+              <a:rPr sz="1600"/>
+              <a:t>GitHub Repository</a:t>
+            </a:r>
+            <a:endParaRPr sz="1600"/>
+          </a:p>
+        </p:txBody>
+      </p:sp>
+    </p:spTree>
+  </p:cSld>
+  <p:clrMapOvr>
+    <a:masterClrMapping/>
+  </p:clrMapOvr>
+</p:sld>
+</file>
+
+<file path=ppt/slides/slide19.xml><?xml version="1.0" encoding="utf-8"?>
+<p:sld xmlns:a="http://schemas.openxmlformats.org/drawingml/2006/main" xmlns:r="http://schemas.openxmlformats.org/officeDocument/2006/relationships" xmlns:p="http://schemas.openxmlformats.org/presentationml/2006/main">
+  <p:cSld>
+    <p:spTree>
+      <p:nvGrpSpPr>
+        <p:cNvPr id="1" name=""/>
+        <p:cNvGrpSpPr/>
+        <p:nvPr/>
+      </p:nvGrpSpPr>
+      <p:grpSpPr/>
+      <p:sp>
+        <p:nvSpPr>
+          <p:cNvPr id="2" name="Title 1"/>
+          <p:cNvSpPr>
+            <a:spLocks noGrp="1"/>
+          </p:cNvSpPr>
+          <p:nvPr>
+            <p:ph type="title"/>
+          </p:nvPr>
+        </p:nvSpPr>
+        <p:spPr/>
+        <p:txBody>
+          <a:bodyPr/>
+          <a:p>
+            <a:r>
+              <a:rPr lang="en-US" altLang="en-GB" b="1">
+                <a:latin typeface="Times New Roman" panose="02020603050405020304" charset="0"/>
+                <a:cs typeface="Times New Roman" panose="02020603050405020304" charset="0"/>
+              </a:rPr>
+              <a:t>Conclusion &amp; SCI Reflection</a:t>
+            </a:r>
+            <a:endParaRPr lang="en-US" altLang="en-GB" b="1">
+              <a:latin typeface="Times New Roman" panose="02020603050405020304" charset="0"/>
+              <a:cs typeface="Times New Roman" panose="02020603050405020304" charset="0"/>
+            </a:endParaRPr>
+          </a:p>
+        </p:txBody>
+      </p:sp>
+      <p:sp>
+        <p:nvSpPr>
+          <p:cNvPr id="3" name="Content Placeholder 2"/>
+          <p:cNvSpPr>
+            <a:spLocks noGrp="1"/>
+          </p:cNvSpPr>
+          <p:nvPr>
+            <p:ph idx="1"/>
+          </p:nvPr>
+        </p:nvSpPr>
+        <p:spPr/>
+        <p:txBody>
+          <a:bodyPr/>
           <a:p>
             <a:pPr marL="0" indent="0">
               <a:buNone/>
             </a:pPr>
             <a:r>
-              <a:rPr lang="en-US" altLang="en-GB">
-                <a:latin typeface="Times New Roman" panose="02020603050405020304" charset="0"/>
-                <a:cs typeface="Times New Roman" panose="02020603050405020304" charset="0"/>
-                <a:sym typeface="+mn-ea"/>
-              </a:rPr>
-              <a:t>Integrated APIs and UI</a:t>
-            </a:r>
-            <a:endParaRPr lang="en-GB" altLang="en-US"/>
+              <a:rPr lang="en-US" altLang="en-GB" b="1">
+                <a:latin typeface="Times New Roman" panose="02020603050405020304" charset="0"/>
+                <a:cs typeface="Times New Roman" panose="02020603050405020304" charset="0"/>
+              </a:rPr>
+              <a:t>Conclusion</a:t>
+            </a:r>
+            <a:r>
+              <a:rPr lang="en-US" altLang="en-GB">
+                <a:latin typeface="Times New Roman" panose="02020603050405020304" charset="0"/>
+                <a:cs typeface="Times New Roman" panose="02020603050405020304" charset="0"/>
+              </a:rPr>
+              <a:t>:</a:t>
+            </a:r>
+            <a:endParaRPr lang="en-US" altLang="en-GB">
+              <a:latin typeface="Times New Roman" panose="02020603050405020304" charset="0"/>
+              <a:cs typeface="Times New Roman" panose="02020603050405020304" charset="0"/>
+            </a:endParaRPr>
+          </a:p>
+          <a:p>
+            <a:pPr marL="0" indent="0">
+              <a:buNone/>
+            </a:pPr>
+            <a:endParaRPr lang="en-US" altLang="en-GB">
+              <a:latin typeface="Times New Roman" panose="02020603050405020304" charset="0"/>
+              <a:cs typeface="Times New Roman" panose="02020603050405020304" charset="0"/>
+            </a:endParaRPr>
+          </a:p>
+          <a:p>
+            <a:pPr marL="0" indent="0">
+              <a:buNone/>
+            </a:pPr>
+            <a:r>
+              <a:rPr lang="en-US" altLang="en-GB">
+                <a:latin typeface="Times New Roman" panose="02020603050405020304" charset="0"/>
+                <a:cs typeface="Times New Roman" panose="02020603050405020304" charset="0"/>
+              </a:rPr>
+              <a:t>Successfully built a scalable AI-driven job matching system</a:t>
+            </a:r>
+            <a:endParaRPr lang="en-US" altLang="en-GB">
+              <a:latin typeface="Times New Roman" panose="02020603050405020304" charset="0"/>
+              <a:cs typeface="Times New Roman" panose="02020603050405020304" charset="0"/>
+            </a:endParaRPr>
+          </a:p>
+          <a:p>
+            <a:pPr marL="0" indent="0">
+              <a:buNone/>
+            </a:pPr>
+            <a:r>
+              <a:rPr lang="en-US" altLang="en-GB">
+                <a:latin typeface="Times New Roman" panose="02020603050405020304" charset="0"/>
+                <a:cs typeface="Times New Roman" panose="02020603050405020304" charset="0"/>
+              </a:rPr>
+              <a:t>Demonstrated the power of multi-agent architectures</a:t>
+            </a:r>
+            <a:endParaRPr lang="en-US" altLang="en-GB">
+              <a:latin typeface="Times New Roman" panose="02020603050405020304" charset="0"/>
+              <a:cs typeface="Times New Roman" panose="02020603050405020304" charset="0"/>
+            </a:endParaRPr>
+          </a:p>
+          <a:p>
+            <a:pPr marL="0" indent="0">
+              <a:buNone/>
+            </a:pPr>
+            <a:r>
+              <a:rPr lang="en-US" altLang="en-GB">
+                <a:latin typeface="Times New Roman" panose="02020603050405020304" charset="0"/>
+                <a:cs typeface="Times New Roman" panose="02020603050405020304" charset="0"/>
+              </a:rPr>
+              <a:t>Improved efficiency of job searching and resume customization</a:t>
+            </a:r>
+            <a:endParaRPr lang="en-US" altLang="en-GB">
+              <a:latin typeface="Times New Roman" panose="02020603050405020304" charset="0"/>
+              <a:cs typeface="Times New Roman" panose="02020603050405020304" charset="0"/>
+            </a:endParaRPr>
           </a:p>
         </p:txBody>
       </p:sp>
@@ -4783,6 +5153,149 @@
                 <a:cs typeface="Times New Roman" panose="02020603050405020304" charset="0"/>
               </a:rPr>
               <a:t>Conclusion &amp; Reflection</a:t>
+            </a:r>
+            <a:endParaRPr lang="en-US" altLang="en-GB">
+              <a:latin typeface="Times New Roman" panose="02020603050405020304" charset="0"/>
+              <a:cs typeface="Times New Roman" panose="02020603050405020304" charset="0"/>
+            </a:endParaRPr>
+          </a:p>
+        </p:txBody>
+      </p:sp>
+    </p:spTree>
+  </p:cSld>
+  <p:clrMapOvr>
+    <a:masterClrMapping/>
+  </p:clrMapOvr>
+</p:sld>
+</file>
+
+<file path=ppt/slides/slide20.xml><?xml version="1.0" encoding="utf-8"?>
+<p:sld xmlns:a="http://schemas.openxmlformats.org/drawingml/2006/main" xmlns:r="http://schemas.openxmlformats.org/officeDocument/2006/relationships" xmlns:p="http://schemas.openxmlformats.org/presentationml/2006/main">
+  <p:cSld>
+    <p:spTree>
+      <p:nvGrpSpPr>
+        <p:cNvPr id="1" name=""/>
+        <p:cNvGrpSpPr/>
+        <p:nvPr/>
+      </p:nvGrpSpPr>
+      <p:grpSpPr/>
+      <p:sp>
+        <p:nvSpPr>
+          <p:cNvPr id="2" name="Title 1"/>
+          <p:cNvSpPr>
+            <a:spLocks noGrp="1"/>
+          </p:cNvSpPr>
+          <p:nvPr>
+            <p:ph type="title"/>
+          </p:nvPr>
+        </p:nvSpPr>
+        <p:spPr/>
+        <p:txBody>
+          <a:bodyPr/>
+          <a:p>
+            <a:r>
+              <a:rPr lang="en-US" altLang="en-GB" b="1">
+                <a:latin typeface="Times New Roman" panose="02020603050405020304" charset="0"/>
+                <a:cs typeface="Times New Roman" panose="02020603050405020304" charset="0"/>
+                <a:sym typeface="+mn-ea"/>
+              </a:rPr>
+              <a:t>Conclusion &amp; SCI Reflection</a:t>
+            </a:r>
+            <a:endParaRPr lang="en-GB" altLang="en-US"/>
+          </a:p>
+        </p:txBody>
+      </p:sp>
+      <p:sp>
+        <p:nvSpPr>
+          <p:cNvPr id="3" name="Content Placeholder 2"/>
+          <p:cNvSpPr>
+            <a:spLocks noGrp="1"/>
+          </p:cNvSpPr>
+          <p:nvPr>
+            <p:ph idx="1"/>
+          </p:nvPr>
+        </p:nvSpPr>
+        <p:spPr/>
+        <p:txBody>
+          <a:bodyPr/>
+          <a:p>
+            <a:pPr marL="0" indent="0">
+              <a:buNone/>
+            </a:pPr>
+            <a:r>
+              <a:rPr lang="en-US" altLang="en-GB" b="1">
+                <a:latin typeface="Times New Roman" panose="02020603050405020304" charset="0"/>
+                <a:cs typeface="Times New Roman" panose="02020603050405020304" charset="0"/>
+              </a:rPr>
+              <a:t>SCI Reflection (Systems &amp; Computational Intelligence):</a:t>
+            </a:r>
+            <a:endParaRPr lang="en-US" altLang="en-GB" b="1">
+              <a:latin typeface="Times New Roman" panose="02020603050405020304" charset="0"/>
+              <a:cs typeface="Times New Roman" panose="02020603050405020304" charset="0"/>
+            </a:endParaRPr>
+          </a:p>
+          <a:p>
+            <a:pPr marL="0" indent="0">
+              <a:buNone/>
+            </a:pPr>
+            <a:r>
+              <a:rPr lang="en-GB" altLang="en-US">
+                <a:latin typeface="Times New Roman" panose="02020603050405020304" charset="0"/>
+                <a:cs typeface="Times New Roman" panose="02020603050405020304" charset="0"/>
+              </a:rPr>
+              <a:t> - &gt; TO BE CHANGED</a:t>
+            </a:r>
+            <a:endParaRPr lang="en-US" altLang="en-GB">
+              <a:latin typeface="Times New Roman" panose="02020603050405020304" charset="0"/>
+              <a:cs typeface="Times New Roman" panose="02020603050405020304" charset="0"/>
+            </a:endParaRPr>
+          </a:p>
+          <a:p>
+            <a:r>
+              <a:rPr lang="en-US" altLang="en-GB">
+                <a:latin typeface="Times New Roman" panose="02020603050405020304" charset="0"/>
+                <a:cs typeface="Times New Roman" panose="02020603050405020304" charset="0"/>
+              </a:rPr>
+              <a:t>Applied modular system design using independent agents</a:t>
+            </a:r>
+            <a:endParaRPr lang="en-US" altLang="en-GB">
+              <a:latin typeface="Times New Roman" panose="02020603050405020304" charset="0"/>
+              <a:cs typeface="Times New Roman" panose="02020603050405020304" charset="0"/>
+            </a:endParaRPr>
+          </a:p>
+          <a:p>
+            <a:r>
+              <a:rPr lang="en-US" altLang="en-GB">
+                <a:latin typeface="Times New Roman" panose="02020603050405020304" charset="0"/>
+                <a:cs typeface="Times New Roman" panose="02020603050405020304" charset="0"/>
+              </a:rPr>
+              <a:t>Used orchestration to coordinate complex workflows</a:t>
+            </a:r>
+            <a:endParaRPr lang="en-US" altLang="en-GB">
+              <a:latin typeface="Times New Roman" panose="02020603050405020304" charset="0"/>
+              <a:cs typeface="Times New Roman" panose="02020603050405020304" charset="0"/>
+            </a:endParaRPr>
+          </a:p>
+          <a:p>
+            <a:r>
+              <a:rPr lang="en-US" altLang="en-GB">
+                <a:latin typeface="Times New Roman" panose="02020603050405020304" charset="0"/>
+                <a:cs typeface="Times New Roman" panose="02020603050405020304" charset="0"/>
+              </a:rPr>
+              <a:t>Demonstrated parallel processing with multiple matchers</a:t>
+            </a:r>
+            <a:endParaRPr lang="en-US" altLang="en-GB">
+              <a:latin typeface="Times New Roman" panose="02020603050405020304" charset="0"/>
+              <a:cs typeface="Times New Roman" panose="02020603050405020304" charset="0"/>
+            </a:endParaRPr>
+          </a:p>
+          <a:p>
+            <a:r>
+              <a:rPr lang="en-US" altLang="en-GB">
+                <a:latin typeface="Times New Roman" panose="02020603050405020304" charset="0"/>
+                <a:cs typeface="Times New Roman" panose="02020603050405020304" charset="0"/>
+              </a:rPr>
+              <a:t>Showed how AI can automate real-world decision-making</a:t>
             </a:r>
             <a:endParaRPr lang="en-US" altLang="en-GB">
               <a:latin typeface="Times New Roman" panose="02020603050405020304" charset="0"/>
